--- a/examples/business-case.pptx
+++ b/examples/business-case.pptx
@@ -3547,8 +3547,8 @@
         </p:nvSpPr>
         <p:spPr>
           <a:xfrm>
-            <a:off x="731520" y="2194560"/>
-            <a:ext cx="10698480" cy="1463040"/>
+            <a:off x="731520" y="1920240"/>
+            <a:ext cx="10698480" cy="1737360"/>
           </a:xfrm>
           <a:prstGeom prst="rect">
             <a:avLst/>
@@ -4945,7 +4945,7 @@
         <p:spPr>
           <a:xfrm>
             <a:off x="457200" y="6217920"/>
-            <a:ext cx="10360152" cy="365760"/>
+            <a:ext cx="8531352" cy="365760"/>
           </a:xfrm>
           <a:prstGeom prst="rect">
             <a:avLst/>

--- a/examples/business-case.pptx
+++ b/examples/business-case.pptx
@@ -5008,7 +5008,7 @@
       </p:sp>
       <p:graphicFrame>
         <p:nvGraphicFramePr>
-          <p:cNvPr id="5" name="Chart 4"/>
+          <p:cNvPr id="5" name="Chart 4" descr="Break-even em 20 meses; pessimista em 30"/>
           <p:cNvGraphicFramePr>
             <a:graphicFrameLocks noGrp="1"/>
           </p:cNvGraphicFramePr>
